--- a/output_pptx/Still.pptx
+++ b/output_pptx/Still.pptx
@@ -3115,8 +3115,8 @@
         </p:nvSpPr>
         <p:spPr>
           <a:xfrm>
-            <a:off x="594360" y="1837944"/>
-            <a:ext cx="11002975" cy="685800"/>
+            <a:off x="640080" y="1650492"/>
+            <a:ext cx="10911535" cy="731520"/>
           </a:xfrm>
           <a:prstGeom prst="rect">
             <a:avLst/>
@@ -3131,7 +3131,7 @@
           <a:p>
             <a:pPr algn="ctr"/>
             <a:r>
-              <a:rPr sz="4400" b="1" i="0">
+              <a:rPr sz="4800" b="1" i="0">
                 <a:solidFill>
                   <a:srgbClr val="FFFFFF"/>
                 </a:solidFill>
@@ -3150,8 +3150,8 @@
         </p:nvSpPr>
         <p:spPr>
           <a:xfrm>
-            <a:off x="594360" y="2560320"/>
-            <a:ext cx="11002975" cy="384048"/>
+            <a:off x="640080" y="2418588"/>
+            <a:ext cx="10911535" cy="365760"/>
           </a:xfrm>
           <a:prstGeom prst="rect">
             <a:avLst/>
@@ -3168,7 +3168,7 @@
             <a:r>
               <a:rPr sz="2400" b="0" i="1">
                 <a:solidFill>
-                  <a:srgbClr val="B4B4B4"/>
+                  <a:srgbClr val="AAAAAA"/>
                 </a:solidFill>
                 <a:latin typeface="Arial"/>
               </a:rPr>
@@ -3185,8 +3185,8 @@
         </p:nvSpPr>
         <p:spPr>
           <a:xfrm>
-            <a:off x="594360" y="2980944"/>
-            <a:ext cx="11002975" cy="347472"/>
+            <a:off x="640080" y="2985516"/>
+            <a:ext cx="10911535" cy="731520"/>
           </a:xfrm>
           <a:prstGeom prst="rect">
             <a:avLst/>
@@ -3201,13 +3201,13 @@
           <a:p>
             <a:pPr algn="ctr"/>
             <a:r>
-              <a:rPr sz="2000" b="0" i="1">
-                <a:solidFill>
-                  <a:srgbClr val="8C8C8C"/>
+              <a:rPr sz="4800" b="1" i="0">
+                <a:solidFill>
+                  <a:srgbClr val="FFFFFF"/>
                 </a:solidFill>
                 <a:latin typeface="Arial"/>
               </a:rPr>
-              <a:t/>
+              <a:t>力       ある    御腕の中に</a:t>
             </a:r>
           </a:p>
         </p:txBody>
@@ -3220,8 +3220,8 @@
         </p:nvSpPr>
         <p:spPr>
           <a:xfrm>
-            <a:off x="594360" y="3529584"/>
-            <a:ext cx="11002975" cy="685800"/>
+            <a:off x="640080" y="3753612"/>
+            <a:ext cx="10911535" cy="365760"/>
           </a:xfrm>
           <a:prstGeom prst="rect">
             <a:avLst/>
@@ -3236,13 +3236,13 @@
           <a:p>
             <a:pPr algn="ctr"/>
             <a:r>
-              <a:rPr sz="4400" b="1" i="0">
-                <a:solidFill>
-                  <a:srgbClr val="FFFFFF"/>
+              <a:rPr sz="2400" b="0" i="1">
+                <a:solidFill>
+                  <a:srgbClr val="AAAAAA"/>
                 </a:solidFill>
                 <a:latin typeface="Arial"/>
               </a:rPr>
-              <a:t>力       ある    御腕の中に</a:t>
+              <a:t>chikara aru    miude no naka ni</a:t>
             </a:r>
           </a:p>
         </p:txBody>
@@ -3255,8 +3255,8 @@
         </p:nvSpPr>
         <p:spPr>
           <a:xfrm>
-            <a:off x="594360" y="4251960"/>
-            <a:ext cx="11002975" cy="384048"/>
+            <a:off x="640080" y="4530852"/>
+            <a:ext cx="10911535" cy="310896"/>
           </a:xfrm>
           <a:prstGeom prst="rect">
             <a:avLst/>
@@ -3271,13 +3271,13 @@
           <a:p>
             <a:pPr algn="ctr"/>
             <a:r>
-              <a:rPr sz="2400" b="0" i="1">
-                <a:solidFill>
-                  <a:srgbClr val="B4B4B4"/>
+              <a:rPr sz="2000" b="0" i="1">
+                <a:solidFill>
+                  <a:srgbClr val="828282"/>
                 </a:solidFill>
                 <a:latin typeface="Arial"/>
               </a:rPr>
-              <a:t>chikara aru    miude no naka ni</a:t>
+              <a:t>Sob Tuas asas</a:t>
             </a:r>
           </a:p>
         </p:txBody>
@@ -3290,8 +3290,8 @@
         </p:nvSpPr>
         <p:spPr>
           <a:xfrm>
-            <a:off x="594360" y="4672584"/>
-            <a:ext cx="11002975" cy="347472"/>
+            <a:off x="640080" y="4896612"/>
+            <a:ext cx="10911535" cy="310896"/>
           </a:xfrm>
           <a:prstGeom prst="rect">
             <a:avLst/>
@@ -3308,11 +3308,11 @@
             <a:r>
               <a:rPr sz="2000" b="0" i="1">
                 <a:solidFill>
-                  <a:srgbClr val="8C8C8C"/>
+                  <a:srgbClr val="828282"/>
                 </a:solidFill>
                 <a:latin typeface="Arial"/>
               </a:rPr>
-              <a:t/>
+              <a:t>Cobre-me</a:t>
             </a:r>
           </a:p>
         </p:txBody>
@@ -3351,8 +3351,8 @@
         </p:nvSpPr>
         <p:spPr>
           <a:xfrm>
-            <a:off x="594360" y="2258568"/>
-            <a:ext cx="11002975" cy="685800"/>
+            <a:off x="640080" y="2052828"/>
+            <a:ext cx="10911535" cy="731520"/>
           </a:xfrm>
           <a:prstGeom prst="rect">
             <a:avLst/>
@@ -3367,7 +3367,7 @@
           <a:p>
             <a:pPr algn="ctr"/>
             <a:r>
-              <a:rPr sz="3705" b="1" i="0">
+              <a:rPr sz="4000" b="1" i="0">
                 <a:solidFill>
                   <a:srgbClr val="FFFFFF"/>
                 </a:solidFill>
@@ -3386,8 +3386,8 @@
         </p:nvSpPr>
         <p:spPr>
           <a:xfrm>
-            <a:off x="594360" y="2980944"/>
-            <a:ext cx="11002975" cy="347472"/>
+            <a:off x="640080" y="2985516"/>
+            <a:ext cx="10911535" cy="731520"/>
           </a:xfrm>
           <a:prstGeom prst="rect">
             <a:avLst/>
@@ -3402,9 +3402,44 @@
           <a:p>
             <a:pPr algn="ctr"/>
             <a:r>
-              <a:rPr sz="2200" b="0" i="1">
-                <a:solidFill>
-                  <a:srgbClr val="8C8C8C"/>
+              <a:rPr sz="4800" b="1" i="0">
+                <a:solidFill>
+                  <a:srgbClr val="FFFFFF"/>
+                </a:solidFill>
+                <a:latin typeface="Arial"/>
+              </a:rPr>
+              <a:t>Minha alma encontra</a:t>
+            </a:r>
+          </a:p>
+        </p:txBody>
+      </p:sp>
+      <p:sp>
+        <p:nvSpPr>
+          <p:cNvPr id="4" name="TextBox 3"/>
+          <p:cNvSpPr txBox="1"/>
+          <p:nvPr/>
+        </p:nvSpPr>
+        <p:spPr>
+          <a:xfrm>
+            <a:off x="640080" y="4128516"/>
+            <a:ext cx="10911535" cy="310896"/>
+          </a:xfrm>
+          <a:prstGeom prst="rect">
+            <a:avLst/>
+          </a:prstGeom>
+          <a:noFill/>
+        </p:spPr>
+        <p:txBody>
+          <a:bodyPr wrap="square">
+            <a:spAutoFit/>
+          </a:bodyPr>
+          <a:lstStyle/>
+          <a:p>
+            <a:pPr algn="ctr"/>
+            <a:r>
+              <a:rPr sz="2000" b="0" i="0">
+                <a:solidFill>
+                  <a:srgbClr val="828282"/>
                 </a:solidFill>
                 <a:latin typeface="Arial"/>
               </a:rPr>
@@ -3415,49 +3450,14 @@
       </p:sp>
       <p:sp>
         <p:nvSpPr>
-          <p:cNvPr id="4" name="TextBox 3"/>
-          <p:cNvSpPr txBox="1"/>
-          <p:nvPr/>
-        </p:nvSpPr>
-        <p:spPr>
-          <a:xfrm>
-            <a:off x="594360" y="3529584"/>
-            <a:ext cx="11002975" cy="685800"/>
-          </a:xfrm>
-          <a:prstGeom prst="rect">
-            <a:avLst/>
-          </a:prstGeom>
-          <a:noFill/>
-        </p:spPr>
-        <p:txBody>
-          <a:bodyPr wrap="square">
-            <a:spAutoFit/>
-          </a:bodyPr>
-          <a:lstStyle/>
-          <a:p>
-            <a:pPr algn="ctr"/>
-            <a:r>
-              <a:rPr sz="4400" b="1" i="0">
-                <a:solidFill>
-                  <a:srgbClr val="FFFFFF"/>
-                </a:solidFill>
-                <a:latin typeface="Arial"/>
-              </a:rPr>
-              <a:t>Minha alma encontra</a:t>
-            </a:r>
-          </a:p>
-        </p:txBody>
-      </p:sp>
-      <p:sp>
-        <p:nvSpPr>
           <p:cNvPr id="5" name="TextBox 4"/>
           <p:cNvSpPr txBox="1"/>
           <p:nvPr/>
         </p:nvSpPr>
         <p:spPr>
           <a:xfrm>
-            <a:off x="594360" y="4251960"/>
-            <a:ext cx="11002975" cy="347472"/>
+            <a:off x="640080" y="4494276"/>
+            <a:ext cx="10911535" cy="310896"/>
           </a:xfrm>
           <a:prstGeom prst="rect">
             <a:avLst/>
@@ -3472,9 +3472,9 @@
           <a:p>
             <a:pPr algn="ctr"/>
             <a:r>
-              <a:rPr sz="2200" b="0" i="1">
-                <a:solidFill>
-                  <a:srgbClr val="8C8C8C"/>
+              <a:rPr sz="2000" b="0" i="0">
+                <a:solidFill>
+                  <a:srgbClr val="828282"/>
                 </a:solidFill>
                 <a:latin typeface="Arial"/>
               </a:rPr>
@@ -3517,8 +3517,8 @@
         </p:nvSpPr>
         <p:spPr>
           <a:xfrm>
-            <a:off x="594360" y="2258568"/>
-            <a:ext cx="11002975" cy="685800"/>
+            <a:off x="640080" y="2052828"/>
+            <a:ext cx="10911535" cy="731520"/>
           </a:xfrm>
           <a:prstGeom prst="rect">
             <a:avLst/>
@@ -3533,7 +3533,7 @@
           <a:p>
             <a:pPr algn="ctr"/>
             <a:r>
-              <a:rPr sz="4022" b="1" i="0">
+              <a:rPr sz="4300" b="1" i="0">
                 <a:solidFill>
                   <a:srgbClr val="FFFFFF"/>
                 </a:solidFill>
@@ -3552,8 +3552,8 @@
         </p:nvSpPr>
         <p:spPr>
           <a:xfrm>
-            <a:off x="594360" y="2980944"/>
-            <a:ext cx="11002975" cy="347472"/>
+            <a:off x="640080" y="2985516"/>
+            <a:ext cx="10911535" cy="731520"/>
           </a:xfrm>
           <a:prstGeom prst="rect">
             <a:avLst/>
@@ -3568,9 +3568,44 @@
           <a:p>
             <a:pPr algn="ctr"/>
             <a:r>
-              <a:rPr sz="2200" b="0" i="1">
-                <a:solidFill>
-                  <a:srgbClr val="8C8C8C"/>
+              <a:rPr sz="4800" b="1" i="0">
+                <a:solidFill>
+                  <a:srgbClr val="FFFFFF"/>
+                </a:solidFill>
+                <a:latin typeface="Arial"/>
+              </a:rPr>
+              <a:t>Pai, Tu és rei sobre a inundação</a:t>
+            </a:r>
+          </a:p>
+        </p:txBody>
+      </p:sp>
+      <p:sp>
+        <p:nvSpPr>
+          <p:cNvPr id="4" name="TextBox 3"/>
+          <p:cNvSpPr txBox="1"/>
+          <p:nvPr/>
+        </p:nvSpPr>
+        <p:spPr>
+          <a:xfrm>
+            <a:off x="640080" y="4128516"/>
+            <a:ext cx="10911535" cy="310896"/>
+          </a:xfrm>
+          <a:prstGeom prst="rect">
+            <a:avLst/>
+          </a:prstGeom>
+          <a:noFill/>
+        </p:spPr>
+        <p:txBody>
+          <a:bodyPr wrap="square">
+            <a:spAutoFit/>
+          </a:bodyPr>
+          <a:lstStyle/>
+          <a:p>
+            <a:pPr algn="ctr"/>
+            <a:r>
+              <a:rPr sz="2000" b="0" i="0">
+                <a:solidFill>
+                  <a:srgbClr val="828282"/>
                 </a:solidFill>
                 <a:latin typeface="Arial"/>
               </a:rPr>
@@ -3581,49 +3616,14 @@
       </p:sp>
       <p:sp>
         <p:nvSpPr>
-          <p:cNvPr id="4" name="TextBox 3"/>
-          <p:cNvSpPr txBox="1"/>
-          <p:nvPr/>
-        </p:nvSpPr>
-        <p:spPr>
-          <a:xfrm>
-            <a:off x="594360" y="3529584"/>
-            <a:ext cx="11002975" cy="685800"/>
-          </a:xfrm>
-          <a:prstGeom prst="rect">
-            <a:avLst/>
-          </a:prstGeom>
-          <a:noFill/>
-        </p:spPr>
-        <p:txBody>
-          <a:bodyPr wrap="square">
-            <a:spAutoFit/>
-          </a:bodyPr>
-          <a:lstStyle/>
-          <a:p>
-            <a:pPr algn="ctr"/>
-            <a:r>
-              <a:rPr sz="4400" b="1" i="0">
-                <a:solidFill>
-                  <a:srgbClr val="FFFFFF"/>
-                </a:solidFill>
-                <a:latin typeface="Arial"/>
-              </a:rPr>
-              <a:t>Pai, Tu és rei sobre a inundação</a:t>
-            </a:r>
-          </a:p>
-        </p:txBody>
-      </p:sp>
-      <p:sp>
-        <p:nvSpPr>
           <p:cNvPr id="5" name="TextBox 4"/>
           <p:cNvSpPr txBox="1"/>
           <p:nvPr/>
         </p:nvSpPr>
         <p:spPr>
           <a:xfrm>
-            <a:off x="594360" y="4251960"/>
-            <a:ext cx="11002975" cy="347472"/>
+            <a:off x="640080" y="4494276"/>
+            <a:ext cx="10911535" cy="310896"/>
           </a:xfrm>
           <a:prstGeom prst="rect">
             <a:avLst/>
@@ -3638,9 +3638,9 @@
           <a:p>
             <a:pPr algn="ctr"/>
             <a:r>
-              <a:rPr sz="2200" b="0" i="1">
-                <a:solidFill>
-                  <a:srgbClr val="8C8C8C"/>
+              <a:rPr sz="2000" b="0" i="0">
+                <a:solidFill>
+                  <a:srgbClr val="828282"/>
                 </a:solidFill>
                 <a:latin typeface="Arial"/>
               </a:rPr>
@@ -3683,8 +3683,8 @@
         </p:nvSpPr>
         <p:spPr>
           <a:xfrm>
-            <a:off x="594360" y="2258568"/>
-            <a:ext cx="11002975" cy="685800"/>
+            <a:off x="640080" y="2052828"/>
+            <a:ext cx="10911535" cy="731520"/>
           </a:xfrm>
           <a:prstGeom prst="rect">
             <a:avLst/>
@@ -3699,7 +3699,7 @@
           <a:p>
             <a:pPr algn="ctr"/>
             <a:r>
-              <a:rPr sz="3705" b="1" i="0">
+              <a:rPr sz="4000" b="1" i="0">
                 <a:solidFill>
                   <a:srgbClr val="FFFFFF"/>
                 </a:solidFill>
@@ -3718,8 +3718,8 @@
         </p:nvSpPr>
         <p:spPr>
           <a:xfrm>
-            <a:off x="594360" y="2980944"/>
-            <a:ext cx="11002975" cy="347472"/>
+            <a:off x="640080" y="2985516"/>
+            <a:ext cx="10911535" cy="731520"/>
           </a:xfrm>
           <a:prstGeom prst="rect">
             <a:avLst/>
@@ -3734,9 +3734,44 @@
           <a:p>
             <a:pPr algn="ctr"/>
             <a:r>
-              <a:rPr sz="2200" b="0" i="1">
-                <a:solidFill>
-                  <a:srgbClr val="8C8C8C"/>
+              <a:rPr sz="4800" b="1" i="0">
+                <a:solidFill>
+                  <a:srgbClr val="FFFFFF"/>
+                </a:solidFill>
+                <a:latin typeface="Arial"/>
+              </a:rPr>
+              <a:t>Minha alma encontra</a:t>
+            </a:r>
+          </a:p>
+        </p:txBody>
+      </p:sp>
+      <p:sp>
+        <p:nvSpPr>
+          <p:cNvPr id="4" name="TextBox 3"/>
+          <p:cNvSpPr txBox="1"/>
+          <p:nvPr/>
+        </p:nvSpPr>
+        <p:spPr>
+          <a:xfrm>
+            <a:off x="640080" y="4128516"/>
+            <a:ext cx="10911535" cy="310896"/>
+          </a:xfrm>
+          <a:prstGeom prst="rect">
+            <a:avLst/>
+          </a:prstGeom>
+          <a:noFill/>
+        </p:spPr>
+        <p:txBody>
+          <a:bodyPr wrap="square">
+            <a:spAutoFit/>
+          </a:bodyPr>
+          <a:lstStyle/>
+          <a:p>
+            <a:pPr algn="ctr"/>
+            <a:r>
+              <a:rPr sz="2000" b="0" i="0">
+                <a:solidFill>
+                  <a:srgbClr val="828282"/>
                 </a:solidFill>
                 <a:latin typeface="Arial"/>
               </a:rPr>
@@ -3747,49 +3782,14 @@
       </p:sp>
       <p:sp>
         <p:nvSpPr>
-          <p:cNvPr id="4" name="TextBox 3"/>
-          <p:cNvSpPr txBox="1"/>
-          <p:nvPr/>
-        </p:nvSpPr>
-        <p:spPr>
-          <a:xfrm>
-            <a:off x="594360" y="3529584"/>
-            <a:ext cx="11002975" cy="685800"/>
-          </a:xfrm>
-          <a:prstGeom prst="rect">
-            <a:avLst/>
-          </a:prstGeom>
-          <a:noFill/>
-        </p:spPr>
-        <p:txBody>
-          <a:bodyPr wrap="square">
-            <a:spAutoFit/>
-          </a:bodyPr>
-          <a:lstStyle/>
-          <a:p>
-            <a:pPr algn="ctr"/>
-            <a:r>
-              <a:rPr sz="4400" b="1" i="0">
-                <a:solidFill>
-                  <a:srgbClr val="FFFFFF"/>
-                </a:solidFill>
-                <a:latin typeface="Arial"/>
-              </a:rPr>
-              <a:t>Minha alma encontra</a:t>
-            </a:r>
-          </a:p>
-        </p:txBody>
-      </p:sp>
-      <p:sp>
-        <p:nvSpPr>
           <p:cNvPr id="5" name="TextBox 4"/>
           <p:cNvSpPr txBox="1"/>
           <p:nvPr/>
         </p:nvSpPr>
         <p:spPr>
           <a:xfrm>
-            <a:off x="594360" y="4251960"/>
-            <a:ext cx="11002975" cy="347472"/>
+            <a:off x="640080" y="4494276"/>
+            <a:ext cx="10911535" cy="310896"/>
           </a:xfrm>
           <a:prstGeom prst="rect">
             <a:avLst/>
@@ -3804,9 +3804,9 @@
           <a:p>
             <a:pPr algn="ctr"/>
             <a:r>
-              <a:rPr sz="2200" b="0" i="1">
-                <a:solidFill>
-                  <a:srgbClr val="8C8C8C"/>
+              <a:rPr sz="2000" b="0" i="0">
+                <a:solidFill>
+                  <a:srgbClr val="828282"/>
                 </a:solidFill>
                 <a:latin typeface="Arial"/>
               </a:rPr>
@@ -3849,8 +3849,8 @@
         </p:nvSpPr>
         <p:spPr>
           <a:xfrm>
-            <a:off x="594360" y="1837944"/>
-            <a:ext cx="11002975" cy="685800"/>
+            <a:off x="640080" y="1650492"/>
+            <a:ext cx="10911535" cy="731520"/>
           </a:xfrm>
           <a:prstGeom prst="rect">
             <a:avLst/>
@@ -3865,7 +3865,7 @@
           <a:p>
             <a:pPr algn="ctr"/>
             <a:r>
-              <a:rPr sz="4400" b="1" i="0">
+              <a:rPr sz="4800" b="1" i="0">
                 <a:solidFill>
                   <a:srgbClr val="FFFFFF"/>
                 </a:solidFill>
@@ -3884,8 +3884,8 @@
         </p:nvSpPr>
         <p:spPr>
           <a:xfrm>
-            <a:off x="594360" y="2560320"/>
-            <a:ext cx="11002975" cy="384048"/>
+            <a:off x="640080" y="2418588"/>
+            <a:ext cx="10911535" cy="365760"/>
           </a:xfrm>
           <a:prstGeom prst="rect">
             <a:avLst/>
@@ -3902,7 +3902,7 @@
             <a:r>
               <a:rPr sz="2400" b="0" i="1">
                 <a:solidFill>
-                  <a:srgbClr val="B4B4B4"/>
+                  <a:srgbClr val="AAAAAA"/>
                 </a:solidFill>
                 <a:latin typeface="Arial"/>
               </a:rPr>
@@ -3919,8 +3919,8 @@
         </p:nvSpPr>
         <p:spPr>
           <a:xfrm>
-            <a:off x="594360" y="2980944"/>
-            <a:ext cx="11002975" cy="347472"/>
+            <a:off x="640080" y="2985516"/>
+            <a:ext cx="10911535" cy="731520"/>
           </a:xfrm>
           <a:prstGeom prst="rect">
             <a:avLst/>
@@ -3935,9 +3935,79 @@
           <a:p>
             <a:pPr algn="ctr"/>
             <a:r>
+              <a:rPr sz="4800" b="1" i="0">
+                <a:solidFill>
+                  <a:srgbClr val="FFFFFF"/>
+                </a:solidFill>
+                <a:latin typeface="Arial"/>
+              </a:rPr>
+              <a:t>主とともに羽ばたく</a:t>
+            </a:r>
+          </a:p>
+        </p:txBody>
+      </p:sp>
+      <p:sp>
+        <p:nvSpPr>
+          <p:cNvPr id="5" name="TextBox 4"/>
+          <p:cNvSpPr txBox="1"/>
+          <p:nvPr/>
+        </p:nvSpPr>
+        <p:spPr>
+          <a:xfrm>
+            <a:off x="640080" y="3753612"/>
+            <a:ext cx="10911535" cy="365760"/>
+          </a:xfrm>
+          <a:prstGeom prst="rect">
+            <a:avLst/>
+          </a:prstGeom>
+          <a:noFill/>
+        </p:spPr>
+        <p:txBody>
+          <a:bodyPr wrap="square">
+            <a:spAutoFit/>
+          </a:bodyPr>
+          <a:lstStyle/>
+          <a:p>
+            <a:pPr algn="ctr"/>
+            <a:r>
+              <a:rPr sz="2400" b="0" i="1">
+                <a:solidFill>
+                  <a:srgbClr val="AAAAAA"/>
+                </a:solidFill>
+                <a:latin typeface="Arial"/>
+              </a:rPr>
+              <a:t>shu to tomo ni habataku</a:t>
+            </a:r>
+          </a:p>
+        </p:txBody>
+      </p:sp>
+      <p:sp>
+        <p:nvSpPr>
+          <p:cNvPr id="6" name="TextBox 5"/>
+          <p:cNvSpPr txBox="1"/>
+          <p:nvPr/>
+        </p:nvSpPr>
+        <p:spPr>
+          <a:xfrm>
+            <a:off x="640080" y="4530852"/>
+            <a:ext cx="10911535" cy="310896"/>
+          </a:xfrm>
+          <a:prstGeom prst="rect">
+            <a:avLst/>
+          </a:prstGeom>
+          <a:noFill/>
+        </p:spPr>
+        <p:txBody>
+          <a:bodyPr wrap="square">
+            <a:spAutoFit/>
+          </a:bodyPr>
+          <a:lstStyle/>
+          <a:p>
+            <a:pPr algn="ctr"/>
+            <a:r>
               <a:rPr sz="2000" b="0" i="1">
                 <a:solidFill>
-                  <a:srgbClr val="8C8C8C"/>
+                  <a:srgbClr val="828282"/>
                 </a:solidFill>
                 <a:latin typeface="Arial"/>
               </a:rPr>
@@ -3948,84 +4018,14 @@
       </p:sp>
       <p:sp>
         <p:nvSpPr>
-          <p:cNvPr id="5" name="TextBox 4"/>
-          <p:cNvSpPr txBox="1"/>
-          <p:nvPr/>
-        </p:nvSpPr>
-        <p:spPr>
-          <a:xfrm>
-            <a:off x="594360" y="3529584"/>
-            <a:ext cx="11002975" cy="685800"/>
-          </a:xfrm>
-          <a:prstGeom prst="rect">
-            <a:avLst/>
-          </a:prstGeom>
-          <a:noFill/>
-        </p:spPr>
-        <p:txBody>
-          <a:bodyPr wrap="square">
-            <a:spAutoFit/>
-          </a:bodyPr>
-          <a:lstStyle/>
-          <a:p>
-            <a:pPr algn="ctr"/>
-            <a:r>
-              <a:rPr sz="4400" b="1" i="0">
-                <a:solidFill>
-                  <a:srgbClr val="FFFFFF"/>
-                </a:solidFill>
-                <a:latin typeface="Arial"/>
-              </a:rPr>
-              <a:t>主とともに羽ばたく</a:t>
-            </a:r>
-          </a:p>
-        </p:txBody>
-      </p:sp>
-      <p:sp>
-        <p:nvSpPr>
-          <p:cNvPr id="6" name="TextBox 5"/>
-          <p:cNvSpPr txBox="1"/>
-          <p:nvPr/>
-        </p:nvSpPr>
-        <p:spPr>
-          <a:xfrm>
-            <a:off x="594360" y="4251960"/>
-            <a:ext cx="11002975" cy="384048"/>
-          </a:xfrm>
-          <a:prstGeom prst="rect">
-            <a:avLst/>
-          </a:prstGeom>
-          <a:noFill/>
-        </p:spPr>
-        <p:txBody>
-          <a:bodyPr wrap="square">
-            <a:spAutoFit/>
-          </a:bodyPr>
-          <a:lstStyle/>
-          <a:p>
-            <a:pPr algn="ctr"/>
-            <a:r>
-              <a:rPr sz="2400" b="0" i="1">
-                <a:solidFill>
-                  <a:srgbClr val="B4B4B4"/>
-                </a:solidFill>
-                <a:latin typeface="Arial"/>
-              </a:rPr>
-              <a:t>shu to tomo ni habataku</a:t>
-            </a:r>
-          </a:p>
-        </p:txBody>
-      </p:sp>
-      <p:sp>
-        <p:nvSpPr>
           <p:cNvPr id="7" name="TextBox 6"/>
           <p:cNvSpPr txBox="1"/>
           <p:nvPr/>
         </p:nvSpPr>
         <p:spPr>
           <a:xfrm>
-            <a:off x="594360" y="4672584"/>
-            <a:ext cx="11002975" cy="347472"/>
+            <a:off x="640080" y="4896612"/>
+            <a:ext cx="10911535" cy="310896"/>
           </a:xfrm>
           <a:prstGeom prst="rect">
             <a:avLst/>
@@ -4042,7 +4042,7 @@
             <a:r>
               <a:rPr sz="2000" b="0" i="1">
                 <a:solidFill>
-                  <a:srgbClr val="8C8C8C"/>
+                  <a:srgbClr val="828282"/>
                 </a:solidFill>
                 <a:latin typeface="Arial"/>
               </a:rPr>
@@ -4085,8 +4085,8 @@
         </p:nvSpPr>
         <p:spPr>
           <a:xfrm>
-            <a:off x="594360" y="1837944"/>
-            <a:ext cx="11002975" cy="685800"/>
+            <a:off x="640080" y="1650492"/>
+            <a:ext cx="10911535" cy="731520"/>
           </a:xfrm>
           <a:prstGeom prst="rect">
             <a:avLst/>
@@ -4101,7 +4101,7 @@
           <a:p>
             <a:pPr algn="ctr"/>
             <a:r>
-              <a:rPr sz="4400" b="1" i="0">
+              <a:rPr sz="4800" b="1" i="0">
                 <a:solidFill>
                   <a:srgbClr val="FFFFFF"/>
                 </a:solidFill>
@@ -4120,8 +4120,8 @@
         </p:nvSpPr>
         <p:spPr>
           <a:xfrm>
-            <a:off x="594360" y="2560320"/>
-            <a:ext cx="11002975" cy="384048"/>
+            <a:off x="640080" y="2418588"/>
+            <a:ext cx="10911535" cy="365760"/>
           </a:xfrm>
           <a:prstGeom prst="rect">
             <a:avLst/>
@@ -4138,7 +4138,7 @@
             <a:r>
               <a:rPr sz="2400" b="0" i="1">
                 <a:solidFill>
-                  <a:srgbClr val="B4B4B4"/>
+                  <a:srgbClr val="AAAAAA"/>
                 </a:solidFill>
                 <a:latin typeface="Arial"/>
               </a:rPr>
@@ -4155,8 +4155,8 @@
         </p:nvSpPr>
         <p:spPr>
           <a:xfrm>
-            <a:off x="594360" y="2980944"/>
-            <a:ext cx="11002975" cy="347472"/>
+            <a:off x="640080" y="2985516"/>
+            <a:ext cx="10911535" cy="731520"/>
           </a:xfrm>
           <a:prstGeom prst="rect">
             <a:avLst/>
@@ -4171,9 +4171,79 @@
           <a:p>
             <a:pPr algn="ctr"/>
             <a:r>
+              <a:rPr sz="4800" b="1" i="0">
+                <a:solidFill>
+                  <a:srgbClr val="FFFFFF"/>
+                </a:solidFill>
+                <a:latin typeface="Arial"/>
+              </a:rPr>
+              <a:t>静まりあなたを知る</a:t>
+            </a:r>
+          </a:p>
+        </p:txBody>
+      </p:sp>
+      <p:sp>
+        <p:nvSpPr>
+          <p:cNvPr id="5" name="TextBox 4"/>
+          <p:cNvSpPr txBox="1"/>
+          <p:nvPr/>
+        </p:nvSpPr>
+        <p:spPr>
+          <a:xfrm>
+            <a:off x="640080" y="3753612"/>
+            <a:ext cx="10911535" cy="365760"/>
+          </a:xfrm>
+          <a:prstGeom prst="rect">
+            <a:avLst/>
+          </a:prstGeom>
+          <a:noFill/>
+        </p:spPr>
+        <p:txBody>
+          <a:bodyPr wrap="square">
+            <a:spAutoFit/>
+          </a:bodyPr>
+          <a:lstStyle/>
+          <a:p>
+            <a:pPr algn="ctr"/>
+            <a:r>
+              <a:rPr sz="2400" b="0" i="1">
+                <a:solidFill>
+                  <a:srgbClr val="AAAAAA"/>
+                </a:solidFill>
+                <a:latin typeface="Arial"/>
+              </a:rPr>
+              <a:t>shizumari anata wo shiru</a:t>
+            </a:r>
+          </a:p>
+        </p:txBody>
+      </p:sp>
+      <p:sp>
+        <p:nvSpPr>
+          <p:cNvPr id="6" name="TextBox 5"/>
+          <p:cNvSpPr txBox="1"/>
+          <p:nvPr/>
+        </p:nvSpPr>
+        <p:spPr>
+          <a:xfrm>
+            <a:off x="640080" y="4530852"/>
+            <a:ext cx="10911535" cy="310896"/>
+          </a:xfrm>
+          <a:prstGeom prst="rect">
+            <a:avLst/>
+          </a:prstGeom>
+          <a:noFill/>
+        </p:spPr>
+        <p:txBody>
+          <a:bodyPr wrap="square">
+            <a:spAutoFit/>
+          </a:bodyPr>
+          <a:lstStyle/>
+          <a:p>
+            <a:pPr algn="ctr"/>
+            <a:r>
               <a:rPr sz="2000" b="0" i="1">
                 <a:solidFill>
-                  <a:srgbClr val="8C8C8C"/>
+                  <a:srgbClr val="828282"/>
                 </a:solidFill>
                 <a:latin typeface="Arial"/>
               </a:rPr>
@@ -4184,84 +4254,14 @@
       </p:sp>
       <p:sp>
         <p:nvSpPr>
-          <p:cNvPr id="5" name="TextBox 4"/>
-          <p:cNvSpPr txBox="1"/>
-          <p:nvPr/>
-        </p:nvSpPr>
-        <p:spPr>
-          <a:xfrm>
-            <a:off x="594360" y="3529584"/>
-            <a:ext cx="11002975" cy="685800"/>
-          </a:xfrm>
-          <a:prstGeom prst="rect">
-            <a:avLst/>
-          </a:prstGeom>
-          <a:noFill/>
-        </p:spPr>
-        <p:txBody>
-          <a:bodyPr wrap="square">
-            <a:spAutoFit/>
-          </a:bodyPr>
-          <a:lstStyle/>
-          <a:p>
-            <a:pPr algn="ctr"/>
-            <a:r>
-              <a:rPr sz="4400" b="1" i="0">
-                <a:solidFill>
-                  <a:srgbClr val="FFFFFF"/>
-                </a:solidFill>
-                <a:latin typeface="Arial"/>
-              </a:rPr>
-              <a:t>静まりあなたを知る</a:t>
-            </a:r>
-          </a:p>
-        </p:txBody>
-      </p:sp>
-      <p:sp>
-        <p:nvSpPr>
-          <p:cNvPr id="6" name="TextBox 5"/>
-          <p:cNvSpPr txBox="1"/>
-          <p:nvPr/>
-        </p:nvSpPr>
-        <p:spPr>
-          <a:xfrm>
-            <a:off x="594360" y="4251960"/>
-            <a:ext cx="11002975" cy="384048"/>
-          </a:xfrm>
-          <a:prstGeom prst="rect">
-            <a:avLst/>
-          </a:prstGeom>
-          <a:noFill/>
-        </p:spPr>
-        <p:txBody>
-          <a:bodyPr wrap="square">
-            <a:spAutoFit/>
-          </a:bodyPr>
-          <a:lstStyle/>
-          <a:p>
-            <a:pPr algn="ctr"/>
-            <a:r>
-              <a:rPr sz="2400" b="0" i="1">
-                <a:solidFill>
-                  <a:srgbClr val="B4B4B4"/>
-                </a:solidFill>
-                <a:latin typeface="Arial"/>
-              </a:rPr>
-              <a:t>shizumari anata wo shiru</a:t>
-            </a:r>
-          </a:p>
-        </p:txBody>
-      </p:sp>
-      <p:sp>
-        <p:nvSpPr>
           <p:cNvPr id="7" name="TextBox 6"/>
           <p:cNvSpPr txBox="1"/>
           <p:nvPr/>
         </p:nvSpPr>
         <p:spPr>
           <a:xfrm>
-            <a:off x="594360" y="4672584"/>
-            <a:ext cx="11002975" cy="347472"/>
+            <a:off x="640080" y="4896612"/>
+            <a:ext cx="10911535" cy="310896"/>
           </a:xfrm>
           <a:prstGeom prst="rect">
             <a:avLst/>
@@ -4278,7 +4278,7 @@
             <a:r>
               <a:rPr sz="2000" b="0" i="1">
                 <a:solidFill>
-                  <a:srgbClr val="8C8C8C"/>
+                  <a:srgbClr val="828282"/>
                 </a:solidFill>
                 <a:latin typeface="Arial"/>
               </a:rPr>
@@ -4321,8 +4321,8 @@
         </p:nvSpPr>
         <p:spPr>
           <a:xfrm>
-            <a:off x="594360" y="1837944"/>
-            <a:ext cx="11002975" cy="685800"/>
+            <a:off x="640080" y="1650492"/>
+            <a:ext cx="10911535" cy="731520"/>
           </a:xfrm>
           <a:prstGeom prst="rect">
             <a:avLst/>
@@ -4337,7 +4337,7 @@
           <a:p>
             <a:pPr algn="ctr"/>
             <a:r>
-              <a:rPr sz="4400" b="1" i="0">
+              <a:rPr sz="4800" b="1" i="0">
                 <a:solidFill>
                   <a:srgbClr val="FFFFFF"/>
                 </a:solidFill>
@@ -4356,8 +4356,8 @@
         </p:nvSpPr>
         <p:spPr>
           <a:xfrm>
-            <a:off x="594360" y="2560320"/>
-            <a:ext cx="11002975" cy="384048"/>
+            <a:off x="640080" y="2418588"/>
+            <a:ext cx="10911535" cy="365760"/>
           </a:xfrm>
           <a:prstGeom prst="rect">
             <a:avLst/>
@@ -4374,7 +4374,7 @@
             <a:r>
               <a:rPr sz="2400" b="0" i="1">
                 <a:solidFill>
-                  <a:srgbClr val="B4B4B4"/>
+                  <a:srgbClr val="AAAAAA"/>
                 </a:solidFill>
                 <a:latin typeface="Arial"/>
               </a:rPr>
@@ -4391,8 +4391,8 @@
         </p:nvSpPr>
         <p:spPr>
           <a:xfrm>
-            <a:off x="594360" y="2980944"/>
-            <a:ext cx="11002975" cy="347472"/>
+            <a:off x="640080" y="2985516"/>
+            <a:ext cx="10911535" cy="731520"/>
           </a:xfrm>
           <a:prstGeom prst="rect">
             <a:avLst/>
@@ -4407,9 +4407,79 @@
           <a:p>
             <a:pPr algn="ctr"/>
             <a:r>
+              <a:rPr sz="4800" b="1" i="0">
+                <a:solidFill>
+                  <a:srgbClr val="FFFFFF"/>
+                </a:solidFill>
+                <a:latin typeface="Arial"/>
+              </a:rPr>
+              <a:t>信頼と        主の力を知る</a:t>
+            </a:r>
+          </a:p>
+        </p:txBody>
+      </p:sp>
+      <p:sp>
+        <p:nvSpPr>
+          <p:cNvPr id="5" name="TextBox 4"/>
+          <p:cNvSpPr txBox="1"/>
+          <p:nvPr/>
+        </p:nvSpPr>
+        <p:spPr>
+          <a:xfrm>
+            <a:off x="640080" y="3753612"/>
+            <a:ext cx="10911535" cy="365760"/>
+          </a:xfrm>
+          <a:prstGeom prst="rect">
+            <a:avLst/>
+          </a:prstGeom>
+          <a:noFill/>
+        </p:spPr>
+        <p:txBody>
+          <a:bodyPr wrap="square">
+            <a:spAutoFit/>
+          </a:bodyPr>
+          <a:lstStyle/>
+          <a:p>
+            <a:pPr algn="ctr"/>
+            <a:r>
+              <a:rPr sz="2400" b="0" i="1">
+                <a:solidFill>
+                  <a:srgbClr val="AAAAAA"/>
+                </a:solidFill>
+                <a:latin typeface="Arial"/>
+              </a:rPr>
+              <a:t>shinrai to    shu no chikara wo shiru</a:t>
+            </a:r>
+          </a:p>
+        </p:txBody>
+      </p:sp>
+      <p:sp>
+        <p:nvSpPr>
+          <p:cNvPr id="6" name="TextBox 5"/>
+          <p:cNvSpPr txBox="1"/>
+          <p:nvPr/>
+        </p:nvSpPr>
+        <p:spPr>
+          <a:xfrm>
+            <a:off x="640080" y="4530852"/>
+            <a:ext cx="10911535" cy="310896"/>
+          </a:xfrm>
+          <a:prstGeom prst="rect">
+            <a:avLst/>
+          </a:prstGeom>
+          <a:noFill/>
+        </p:spPr>
+        <p:txBody>
+          <a:bodyPr wrap="square">
+            <a:spAutoFit/>
+          </a:bodyPr>
+          <a:lstStyle/>
+          <a:p>
+            <a:pPr algn="ctr"/>
+            <a:r>
               <a:rPr sz="2000" b="0" i="1">
                 <a:solidFill>
-                  <a:srgbClr val="8C8C8C"/>
+                  <a:srgbClr val="828282"/>
                 </a:solidFill>
                 <a:latin typeface="Arial"/>
               </a:rPr>
@@ -4420,84 +4490,14 @@
       </p:sp>
       <p:sp>
         <p:nvSpPr>
-          <p:cNvPr id="5" name="TextBox 4"/>
-          <p:cNvSpPr txBox="1"/>
-          <p:nvPr/>
-        </p:nvSpPr>
-        <p:spPr>
-          <a:xfrm>
-            <a:off x="594360" y="3529584"/>
-            <a:ext cx="11002975" cy="685800"/>
-          </a:xfrm>
-          <a:prstGeom prst="rect">
-            <a:avLst/>
-          </a:prstGeom>
-          <a:noFill/>
-        </p:spPr>
-        <p:txBody>
-          <a:bodyPr wrap="square">
-            <a:spAutoFit/>
-          </a:bodyPr>
-          <a:lstStyle/>
-          <a:p>
-            <a:pPr algn="ctr"/>
-            <a:r>
-              <a:rPr sz="4400" b="1" i="0">
-                <a:solidFill>
-                  <a:srgbClr val="FFFFFF"/>
-                </a:solidFill>
-                <a:latin typeface="Arial"/>
-              </a:rPr>
-              <a:t>信頼と        主の力を知る</a:t>
-            </a:r>
-          </a:p>
-        </p:txBody>
-      </p:sp>
-      <p:sp>
-        <p:nvSpPr>
-          <p:cNvPr id="6" name="TextBox 5"/>
-          <p:cNvSpPr txBox="1"/>
-          <p:nvPr/>
-        </p:nvSpPr>
-        <p:spPr>
-          <a:xfrm>
-            <a:off x="594360" y="4251960"/>
-            <a:ext cx="11002975" cy="384048"/>
-          </a:xfrm>
-          <a:prstGeom prst="rect">
-            <a:avLst/>
-          </a:prstGeom>
-          <a:noFill/>
-        </p:spPr>
-        <p:txBody>
-          <a:bodyPr wrap="square">
-            <a:spAutoFit/>
-          </a:bodyPr>
-          <a:lstStyle/>
-          <a:p>
-            <a:pPr algn="ctr"/>
-            <a:r>
-              <a:rPr sz="2400" b="0" i="1">
-                <a:solidFill>
-                  <a:srgbClr val="B4B4B4"/>
-                </a:solidFill>
-                <a:latin typeface="Arial"/>
-              </a:rPr>
-              <a:t>shinrai to    shu no chikara wo shiru</a:t>
-            </a:r>
-          </a:p>
-        </p:txBody>
-      </p:sp>
-      <p:sp>
-        <p:nvSpPr>
           <p:cNvPr id="7" name="TextBox 6"/>
           <p:cNvSpPr txBox="1"/>
           <p:nvPr/>
         </p:nvSpPr>
         <p:spPr>
           <a:xfrm>
-            <a:off x="594360" y="4672584"/>
-            <a:ext cx="11002975" cy="347472"/>
+            <a:off x="640080" y="4896612"/>
+            <a:ext cx="10911535" cy="310896"/>
           </a:xfrm>
           <a:prstGeom prst="rect">
             <a:avLst/>
@@ -4514,7 +4514,7 @@
             <a:r>
               <a:rPr sz="2000" b="0" i="1">
                 <a:solidFill>
-                  <a:srgbClr val="8C8C8C"/>
+                  <a:srgbClr val="828282"/>
                 </a:solidFill>
                 <a:latin typeface="Arial"/>
               </a:rPr>
@@ -4557,8 +4557,8 @@
         </p:nvSpPr>
         <p:spPr>
           <a:xfrm>
-            <a:off x="594360" y="1837944"/>
-            <a:ext cx="11002975" cy="685800"/>
+            <a:off x="640080" y="1650492"/>
+            <a:ext cx="10911535" cy="731520"/>
           </a:xfrm>
           <a:prstGeom prst="rect">
             <a:avLst/>
@@ -4573,7 +4573,7 @@
           <a:p>
             <a:pPr algn="ctr"/>
             <a:r>
-              <a:rPr sz="4400" b="1" i="0">
+              <a:rPr sz="4800" b="1" i="0">
                 <a:solidFill>
                   <a:srgbClr val="FFFFFF"/>
                 </a:solidFill>
@@ -4592,8 +4592,8 @@
         </p:nvSpPr>
         <p:spPr>
           <a:xfrm>
-            <a:off x="594360" y="2560320"/>
-            <a:ext cx="11002975" cy="384048"/>
+            <a:off x="640080" y="2418588"/>
+            <a:ext cx="10911535" cy="365760"/>
           </a:xfrm>
           <a:prstGeom prst="rect">
             <a:avLst/>
@@ -4610,7 +4610,7 @@
             <a:r>
               <a:rPr sz="2400" b="0" i="1">
                 <a:solidFill>
-                  <a:srgbClr val="B4B4B4"/>
+                  <a:srgbClr val="AAAAAA"/>
                 </a:solidFill>
                 <a:latin typeface="Arial"/>
               </a:rPr>
@@ -4627,8 +4627,8 @@
         </p:nvSpPr>
         <p:spPr>
           <a:xfrm>
-            <a:off x="594360" y="2980944"/>
-            <a:ext cx="11002975" cy="347472"/>
+            <a:off x="640080" y="2985516"/>
+            <a:ext cx="10911535" cy="731520"/>
           </a:xfrm>
           <a:prstGeom prst="rect">
             <a:avLst/>
@@ -4643,13 +4643,13 @@
           <a:p>
             <a:pPr algn="ctr"/>
             <a:r>
-              <a:rPr sz="2000" b="0" i="1">
-                <a:solidFill>
-                  <a:srgbClr val="8C8C8C"/>
+              <a:rPr sz="4800" b="1" i="0">
+                <a:solidFill>
+                  <a:srgbClr val="FFFFFF"/>
                 </a:solidFill>
                 <a:latin typeface="Arial"/>
               </a:rPr>
-              <a:t/>
+              <a:t>主とともに羽ばたく</a:t>
             </a:r>
           </a:p>
         </p:txBody>
@@ -4662,8 +4662,8 @@
         </p:nvSpPr>
         <p:spPr>
           <a:xfrm>
-            <a:off x="594360" y="3529584"/>
-            <a:ext cx="11002975" cy="685800"/>
+            <a:off x="640080" y="3753612"/>
+            <a:ext cx="10911535" cy="365760"/>
           </a:xfrm>
           <a:prstGeom prst="rect">
             <a:avLst/>
@@ -4678,13 +4678,13 @@
           <a:p>
             <a:pPr algn="ctr"/>
             <a:r>
-              <a:rPr sz="4400" b="1" i="0">
-                <a:solidFill>
-                  <a:srgbClr val="FFFFFF"/>
+              <a:rPr sz="2400" b="0" i="1">
+                <a:solidFill>
+                  <a:srgbClr val="AAAAAA"/>
                 </a:solidFill>
                 <a:latin typeface="Arial"/>
               </a:rPr>
-              <a:t>主とともに羽ばたく</a:t>
+              <a:t>shu to tomo ni habataku</a:t>
             </a:r>
           </a:p>
         </p:txBody>
@@ -4697,8 +4697,8 @@
         </p:nvSpPr>
         <p:spPr>
           <a:xfrm>
-            <a:off x="594360" y="4251960"/>
-            <a:ext cx="11002975" cy="384048"/>
+            <a:off x="640080" y="4530852"/>
+            <a:ext cx="10911535" cy="310896"/>
           </a:xfrm>
           <a:prstGeom prst="rect">
             <a:avLst/>
@@ -4713,13 +4713,13 @@
           <a:p>
             <a:pPr algn="ctr"/>
             <a:r>
-              <a:rPr sz="2400" b="0" i="1">
-                <a:solidFill>
-                  <a:srgbClr val="B4B4B4"/>
+              <a:rPr sz="2000" b="0" i="1">
+                <a:solidFill>
+                  <a:srgbClr val="828282"/>
                 </a:solidFill>
                 <a:latin typeface="Arial"/>
               </a:rPr>
-              <a:t>shu to tomo ni habataku</a:t>
+              <a:t>Contigo voarei sobre as tempestades</a:t>
             </a:r>
           </a:p>
         </p:txBody>
@@ -4732,8 +4732,8 @@
         </p:nvSpPr>
         <p:spPr>
           <a:xfrm>
-            <a:off x="594360" y="4672584"/>
-            <a:ext cx="11002975" cy="347472"/>
+            <a:off x="640080" y="4896612"/>
+            <a:ext cx="10911535" cy="310896"/>
           </a:xfrm>
           <a:prstGeom prst="rect">
             <a:avLst/>
@@ -4750,11 +4750,11 @@
             <a:r>
               <a:rPr sz="2000" b="0" i="1">
                 <a:solidFill>
-                  <a:srgbClr val="8C8C8C"/>
+                  <a:srgbClr val="828282"/>
                 </a:solidFill>
                 <a:latin typeface="Arial"/>
               </a:rPr>
-              <a:t/>
+              <a:t>Pai, Tu és rei sobre a inundação</a:t>
             </a:r>
           </a:p>
         </p:txBody>
@@ -4793,8 +4793,8 @@
         </p:nvSpPr>
         <p:spPr>
           <a:xfrm>
-            <a:off x="594360" y="1837944"/>
-            <a:ext cx="11002975" cy="685800"/>
+            <a:off x="640080" y="1650492"/>
+            <a:ext cx="10911535" cy="731520"/>
           </a:xfrm>
           <a:prstGeom prst="rect">
             <a:avLst/>
@@ -4809,7 +4809,7 @@
           <a:p>
             <a:pPr algn="ctr"/>
             <a:r>
-              <a:rPr sz="4400" b="1" i="0">
+              <a:rPr sz="4800" b="1" i="0">
                 <a:solidFill>
                   <a:srgbClr val="FFFFFF"/>
                 </a:solidFill>
@@ -4828,8 +4828,8 @@
         </p:nvSpPr>
         <p:spPr>
           <a:xfrm>
-            <a:off x="594360" y="2560320"/>
-            <a:ext cx="11002975" cy="384048"/>
+            <a:off x="640080" y="2418588"/>
+            <a:ext cx="10911535" cy="365760"/>
           </a:xfrm>
           <a:prstGeom prst="rect">
             <a:avLst/>
@@ -4846,7 +4846,7 @@
             <a:r>
               <a:rPr sz="2400" b="0" i="1">
                 <a:solidFill>
-                  <a:srgbClr val="B4B4B4"/>
+                  <a:srgbClr val="AAAAAA"/>
                 </a:solidFill>
                 <a:latin typeface="Arial"/>
               </a:rPr>
@@ -4863,8 +4863,8 @@
         </p:nvSpPr>
         <p:spPr>
           <a:xfrm>
-            <a:off x="594360" y="2980944"/>
-            <a:ext cx="11002975" cy="347472"/>
+            <a:off x="640080" y="2985516"/>
+            <a:ext cx="10911535" cy="731520"/>
           </a:xfrm>
           <a:prstGeom prst="rect">
             <a:avLst/>
@@ -4879,13 +4879,13 @@
           <a:p>
             <a:pPr algn="ctr"/>
             <a:r>
-              <a:rPr sz="2000" b="0" i="1">
-                <a:solidFill>
-                  <a:srgbClr val="8C8C8C"/>
+              <a:rPr sz="4800" b="1" i="0">
+                <a:solidFill>
+                  <a:srgbClr val="FFFFFF"/>
                 </a:solidFill>
                 <a:latin typeface="Arial"/>
               </a:rPr>
-              <a:t/>
+              <a:t>静まりあなたを知る         (繰り返し)</a:t>
             </a:r>
           </a:p>
         </p:txBody>
@@ -4898,8 +4898,8 @@
         </p:nvSpPr>
         <p:spPr>
           <a:xfrm>
-            <a:off x="594360" y="3529584"/>
-            <a:ext cx="11002975" cy="685800"/>
+            <a:off x="640080" y="3753612"/>
+            <a:ext cx="10911535" cy="365760"/>
           </a:xfrm>
           <a:prstGeom prst="rect">
             <a:avLst/>
@@ -4914,13 +4914,13 @@
           <a:p>
             <a:pPr algn="ctr"/>
             <a:r>
-              <a:rPr sz="4400" b="1" i="0">
-                <a:solidFill>
-                  <a:srgbClr val="FFFFFF"/>
+              <a:rPr sz="2400" b="0" i="1">
+                <a:solidFill>
+                  <a:srgbClr val="AAAAAA"/>
                 </a:solidFill>
                 <a:latin typeface="Arial"/>
               </a:rPr>
-              <a:t>静まりあなたを知る         (繰り返し)</a:t>
+              <a:t>shizumari anata wo shiru</a:t>
             </a:r>
           </a:p>
         </p:txBody>
@@ -4933,8 +4933,8 @@
         </p:nvSpPr>
         <p:spPr>
           <a:xfrm>
-            <a:off x="594360" y="4251960"/>
-            <a:ext cx="11002975" cy="384048"/>
+            <a:off x="640080" y="4530852"/>
+            <a:ext cx="10911535" cy="310896"/>
           </a:xfrm>
           <a:prstGeom prst="rect">
             <a:avLst/>
@@ -4949,13 +4949,13 @@
           <a:p>
             <a:pPr algn="ctr"/>
             <a:r>
-              <a:rPr sz="2400" b="0" i="1">
-                <a:solidFill>
-                  <a:srgbClr val="B4B4B4"/>
+              <a:rPr sz="2000" b="0" i="1">
+                <a:solidFill>
+                  <a:srgbClr val="828282"/>
                 </a:solidFill>
                 <a:latin typeface="Arial"/>
               </a:rPr>
-              <a:t>shizumari anata wo shiru</a:t>
+              <a:t>Eu ainda estarei e saberei que és Deus</a:t>
             </a:r>
           </a:p>
         </p:txBody>
@@ -4968,8 +4968,8 @@
         </p:nvSpPr>
         <p:spPr>
           <a:xfrm>
-            <a:off x="594360" y="4672584"/>
-            <a:ext cx="11002975" cy="347472"/>
+            <a:off x="640080" y="4896612"/>
+            <a:ext cx="10911535" cy="310896"/>
           </a:xfrm>
           <a:prstGeom prst="rect">
             <a:avLst/>
@@ -4986,11 +4986,11 @@
             <a:r>
               <a:rPr sz="2000" b="0" i="1">
                 <a:solidFill>
-                  <a:srgbClr val="8C8C8C"/>
+                  <a:srgbClr val="828282"/>
                 </a:solidFill>
                 <a:latin typeface="Arial"/>
               </a:rPr>
-              <a:t/>
+              <a:t>Minha alma encontra</a:t>
             </a:r>
           </a:p>
         </p:txBody>
@@ -5029,8 +5029,8 @@
         </p:nvSpPr>
         <p:spPr>
           <a:xfrm>
-            <a:off x="594360" y="2258568"/>
-            <a:ext cx="11002975" cy="685800"/>
+            <a:off x="640080" y="2052828"/>
+            <a:ext cx="10911535" cy="731520"/>
           </a:xfrm>
           <a:prstGeom prst="rect">
             <a:avLst/>
@@ -5045,7 +5045,7 @@
           <a:p>
             <a:pPr algn="ctr"/>
             <a:r>
-              <a:rPr sz="4400" b="1" i="0">
+              <a:rPr sz="4800" b="1" i="0">
                 <a:solidFill>
                   <a:srgbClr val="FFFFFF"/>
                 </a:solidFill>
@@ -5064,8 +5064,8 @@
         </p:nvSpPr>
         <p:spPr>
           <a:xfrm>
-            <a:off x="594360" y="2980944"/>
-            <a:ext cx="11002975" cy="347472"/>
+            <a:off x="640080" y="2985516"/>
+            <a:ext cx="10911535" cy="731520"/>
           </a:xfrm>
           <a:prstGeom prst="rect">
             <a:avLst/>
@@ -5080,9 +5080,44 @@
           <a:p>
             <a:pPr algn="ctr"/>
             <a:r>
-              <a:rPr sz="2200" b="0" i="1">
-                <a:solidFill>
-                  <a:srgbClr val="8C8C8C"/>
+              <a:rPr sz="4800" b="1" i="0">
+                <a:solidFill>
+                  <a:srgbClr val="FFFFFF"/>
+                </a:solidFill>
+                <a:latin typeface="Arial"/>
+              </a:rPr>
+              <a:t>Cobre-me</a:t>
+            </a:r>
+          </a:p>
+        </p:txBody>
+      </p:sp>
+      <p:sp>
+        <p:nvSpPr>
+          <p:cNvPr id="4" name="TextBox 3"/>
+          <p:cNvSpPr txBox="1"/>
+          <p:nvPr/>
+        </p:nvSpPr>
+        <p:spPr>
+          <a:xfrm>
+            <a:off x="640080" y="4128516"/>
+            <a:ext cx="10911535" cy="310896"/>
+          </a:xfrm>
+          <a:prstGeom prst="rect">
+            <a:avLst/>
+          </a:prstGeom>
+          <a:noFill/>
+        </p:spPr>
+        <p:txBody>
+          <a:bodyPr wrap="square">
+            <a:spAutoFit/>
+          </a:bodyPr>
+          <a:lstStyle/>
+          <a:p>
+            <a:pPr algn="ctr"/>
+            <a:r>
+              <a:rPr sz="2000" b="0" i="0">
+                <a:solidFill>
+                  <a:srgbClr val="828282"/>
                 </a:solidFill>
                 <a:latin typeface="Arial"/>
               </a:rPr>
@@ -5093,49 +5128,14 @@
       </p:sp>
       <p:sp>
         <p:nvSpPr>
-          <p:cNvPr id="4" name="TextBox 3"/>
-          <p:cNvSpPr txBox="1"/>
-          <p:nvPr/>
-        </p:nvSpPr>
-        <p:spPr>
-          <a:xfrm>
-            <a:off x="594360" y="3529584"/>
-            <a:ext cx="11002975" cy="685800"/>
-          </a:xfrm>
-          <a:prstGeom prst="rect">
-            <a:avLst/>
-          </a:prstGeom>
-          <a:noFill/>
-        </p:spPr>
-        <p:txBody>
-          <a:bodyPr wrap="square">
-            <a:spAutoFit/>
-          </a:bodyPr>
-          <a:lstStyle/>
-          <a:p>
-            <a:pPr algn="ctr"/>
-            <a:r>
-              <a:rPr sz="4400" b="1" i="0">
-                <a:solidFill>
-                  <a:srgbClr val="FFFFFF"/>
-                </a:solidFill>
-                <a:latin typeface="Arial"/>
-              </a:rPr>
-              <a:t>Cobre-me</a:t>
-            </a:r>
-          </a:p>
-        </p:txBody>
-      </p:sp>
-      <p:sp>
-        <p:nvSpPr>
           <p:cNvPr id="5" name="TextBox 4"/>
           <p:cNvSpPr txBox="1"/>
           <p:nvPr/>
         </p:nvSpPr>
         <p:spPr>
           <a:xfrm>
-            <a:off x="594360" y="4251960"/>
-            <a:ext cx="11002975" cy="347472"/>
+            <a:off x="640080" y="4494276"/>
+            <a:ext cx="10911535" cy="310896"/>
           </a:xfrm>
           <a:prstGeom prst="rect">
             <a:avLst/>
@@ -5150,9 +5150,9 @@
           <a:p>
             <a:pPr algn="ctr"/>
             <a:r>
-              <a:rPr sz="2200" b="0" i="1">
-                <a:solidFill>
-                  <a:srgbClr val="8C8C8C"/>
+              <a:rPr sz="2000" b="0" i="0">
+                <a:solidFill>
+                  <a:srgbClr val="828282"/>
                 </a:solidFill>
                 <a:latin typeface="Arial"/>
               </a:rPr>
@@ -5195,8 +5195,8 @@
         </p:nvSpPr>
         <p:spPr>
           <a:xfrm>
-            <a:off x="594360" y="2258568"/>
-            <a:ext cx="11002975" cy="685800"/>
+            <a:off x="640080" y="2052828"/>
+            <a:ext cx="10911535" cy="731520"/>
           </a:xfrm>
           <a:prstGeom prst="rect">
             <a:avLst/>
@@ -5211,7 +5211,7 @@
           <a:p>
             <a:pPr algn="ctr"/>
             <a:r>
-              <a:rPr sz="4400" b="1" i="0">
+              <a:rPr sz="4800" b="1" i="0">
                 <a:solidFill>
                   <a:srgbClr val="FFFFFF"/>
                 </a:solidFill>
@@ -5230,8 +5230,8 @@
         </p:nvSpPr>
         <p:spPr>
           <a:xfrm>
-            <a:off x="594360" y="2980944"/>
-            <a:ext cx="11002975" cy="347472"/>
+            <a:off x="640080" y="2985516"/>
+            <a:ext cx="10911535" cy="731520"/>
           </a:xfrm>
           <a:prstGeom prst="rect">
             <a:avLst/>
@@ -5246,83 +5246,13 @@
           <a:p>
             <a:pPr algn="ctr"/>
             <a:r>
-              <a:rPr sz="2200" b="0" i="1">
-                <a:solidFill>
-                  <a:srgbClr val="8C8C8C"/>
-                </a:solidFill>
-                <a:latin typeface="Arial"/>
-              </a:rPr>
-              <a:t/>
-            </a:r>
-          </a:p>
-        </p:txBody>
-      </p:sp>
-      <p:sp>
-        <p:nvSpPr>
-          <p:cNvPr id="4" name="TextBox 3"/>
-          <p:cNvSpPr txBox="1"/>
-          <p:nvPr/>
-        </p:nvSpPr>
-        <p:spPr>
-          <a:xfrm>
-            <a:off x="594360" y="3529584"/>
-            <a:ext cx="11002975" cy="685800"/>
-          </a:xfrm>
-          <a:prstGeom prst="rect">
-            <a:avLst/>
-          </a:prstGeom>
-          <a:noFill/>
-        </p:spPr>
-        <p:txBody>
-          <a:bodyPr wrap="square">
-            <a:spAutoFit/>
-          </a:bodyPr>
-          <a:lstStyle/>
-          <a:p>
-            <a:pPr algn="ctr"/>
-            <a:r>
-              <a:rPr sz="2707" b="1" i="0">
+              <a:rPr sz="2900" b="1" i="0">
                 <a:solidFill>
                   <a:srgbClr val="FFFFFF"/>
                 </a:solidFill>
                 <a:latin typeface="Arial"/>
               </a:rPr>
               <a:t>Quando os oceanos se levantam e as tempestades rugem</a:t>
-            </a:r>
-          </a:p>
-        </p:txBody>
-      </p:sp>
-      <p:sp>
-        <p:nvSpPr>
-          <p:cNvPr id="5" name="TextBox 4"/>
-          <p:cNvSpPr txBox="1"/>
-          <p:nvPr/>
-        </p:nvSpPr>
-        <p:spPr>
-          <a:xfrm>
-            <a:off x="594360" y="4251960"/>
-            <a:ext cx="11002975" cy="347472"/>
-          </a:xfrm>
-          <a:prstGeom prst="rect">
-            <a:avLst/>
-          </a:prstGeom>
-          <a:noFill/>
-        </p:spPr>
-        <p:txBody>
-          <a:bodyPr wrap="square">
-            <a:spAutoFit/>
-          </a:bodyPr>
-          <a:lstStyle/>
-          <a:p>
-            <a:pPr algn="ctr"/>
-            <a:r>
-              <a:rPr sz="2200" b="0" i="1">
-                <a:solidFill>
-                  <a:srgbClr val="8C8C8C"/>
-                </a:solidFill>
-                <a:latin typeface="Arial"/>
-              </a:rPr>
-              <a:t/>
             </a:r>
           </a:p>
         </p:txBody>
@@ -5361,8 +5291,8 @@
         </p:nvSpPr>
         <p:spPr>
           <a:xfrm>
-            <a:off x="594360" y="2258568"/>
-            <a:ext cx="11002975" cy="685800"/>
+            <a:off x="640080" y="2052828"/>
+            <a:ext cx="10911535" cy="731520"/>
           </a:xfrm>
           <a:prstGeom prst="rect">
             <a:avLst/>
@@ -5377,7 +5307,7 @@
           <a:p>
             <a:pPr algn="ctr"/>
             <a:r>
-              <a:rPr sz="4022" b="1" i="0">
+              <a:rPr sz="4300" b="1" i="0">
                 <a:solidFill>
                   <a:srgbClr val="FFFFFF"/>
                 </a:solidFill>
@@ -5396,8 +5326,8 @@
         </p:nvSpPr>
         <p:spPr>
           <a:xfrm>
-            <a:off x="594360" y="2980944"/>
-            <a:ext cx="11002975" cy="347472"/>
+            <a:off x="640080" y="2985516"/>
+            <a:ext cx="10911535" cy="731520"/>
           </a:xfrm>
           <a:prstGeom prst="rect">
             <a:avLst/>
@@ -5412,9 +5342,44 @@
           <a:p>
             <a:pPr algn="ctr"/>
             <a:r>
-              <a:rPr sz="2200" b="0" i="1">
-                <a:solidFill>
-                  <a:srgbClr val="8C8C8C"/>
+              <a:rPr sz="4800" b="1" i="0">
+                <a:solidFill>
+                  <a:srgbClr val="FFFFFF"/>
+                </a:solidFill>
+                <a:latin typeface="Arial"/>
+              </a:rPr>
+              <a:t>Pai, Tu és rei sobre a inundação</a:t>
+            </a:r>
+          </a:p>
+        </p:txBody>
+      </p:sp>
+      <p:sp>
+        <p:nvSpPr>
+          <p:cNvPr id="4" name="TextBox 3"/>
+          <p:cNvSpPr txBox="1"/>
+          <p:nvPr/>
+        </p:nvSpPr>
+        <p:spPr>
+          <a:xfrm>
+            <a:off x="640080" y="4128516"/>
+            <a:ext cx="10911535" cy="310896"/>
+          </a:xfrm>
+          <a:prstGeom prst="rect">
+            <a:avLst/>
+          </a:prstGeom>
+          <a:noFill/>
+        </p:spPr>
+        <p:txBody>
+          <a:bodyPr wrap="square">
+            <a:spAutoFit/>
+          </a:bodyPr>
+          <a:lstStyle/>
+          <a:p>
+            <a:pPr algn="ctr"/>
+            <a:r>
+              <a:rPr sz="2000" b="0" i="0">
+                <a:solidFill>
+                  <a:srgbClr val="828282"/>
                 </a:solidFill>
                 <a:latin typeface="Arial"/>
               </a:rPr>
@@ -5425,49 +5390,14 @@
       </p:sp>
       <p:sp>
         <p:nvSpPr>
-          <p:cNvPr id="4" name="TextBox 3"/>
-          <p:cNvSpPr txBox="1"/>
-          <p:nvPr/>
-        </p:nvSpPr>
-        <p:spPr>
-          <a:xfrm>
-            <a:off x="594360" y="3529584"/>
-            <a:ext cx="11002975" cy="685800"/>
-          </a:xfrm>
-          <a:prstGeom prst="rect">
-            <a:avLst/>
-          </a:prstGeom>
-          <a:noFill/>
-        </p:spPr>
-        <p:txBody>
-          <a:bodyPr wrap="square">
-            <a:spAutoFit/>
-          </a:bodyPr>
-          <a:lstStyle/>
-          <a:p>
-            <a:pPr algn="ctr"/>
-            <a:r>
-              <a:rPr sz="4400" b="1" i="0">
-                <a:solidFill>
-                  <a:srgbClr val="FFFFFF"/>
-                </a:solidFill>
-                <a:latin typeface="Arial"/>
-              </a:rPr>
-              <a:t>Pai, Tu és rei sobre a inundação</a:t>
-            </a:r>
-          </a:p>
-        </p:txBody>
-      </p:sp>
-      <p:sp>
-        <p:nvSpPr>
           <p:cNvPr id="5" name="TextBox 4"/>
           <p:cNvSpPr txBox="1"/>
           <p:nvPr/>
         </p:nvSpPr>
         <p:spPr>
           <a:xfrm>
-            <a:off x="594360" y="4251960"/>
-            <a:ext cx="11002975" cy="347472"/>
+            <a:off x="640080" y="4494276"/>
+            <a:ext cx="10911535" cy="310896"/>
           </a:xfrm>
           <a:prstGeom prst="rect">
             <a:avLst/>
@@ -5482,9 +5412,9 @@
           <a:p>
             <a:pPr algn="ctr"/>
             <a:r>
-              <a:rPr sz="2200" b="0" i="1">
-                <a:solidFill>
-                  <a:srgbClr val="8C8C8C"/>
+              <a:rPr sz="2000" b="0" i="0">
+                <a:solidFill>
+                  <a:srgbClr val="828282"/>
                 </a:solidFill>
                 <a:latin typeface="Arial"/>
               </a:rPr>

--- a/output_pptx/Still.pptx
+++ b/output_pptx/Still.pptx
@@ -5253,6 +5253,76 @@
                 <a:latin typeface="Arial"/>
               </a:rPr>
               <a:t>Quando os oceanos se levantam e as tempestades rugem</a:t>
+            </a:r>
+          </a:p>
+        </p:txBody>
+      </p:sp>
+      <p:sp>
+        <p:nvSpPr>
+          <p:cNvPr id="4" name="TextBox 3"/>
+          <p:cNvSpPr txBox="1"/>
+          <p:nvPr/>
+        </p:nvSpPr>
+        <p:spPr>
+          <a:xfrm>
+            <a:off x="640080" y="4128516"/>
+            <a:ext cx="10911535" cy="310896"/>
+          </a:xfrm>
+          <a:prstGeom prst="rect">
+            <a:avLst/>
+          </a:prstGeom>
+          <a:noFill/>
+        </p:spPr>
+        <p:txBody>
+          <a:bodyPr wrap="square">
+            <a:spAutoFit/>
+          </a:bodyPr>
+          <a:lstStyle/>
+          <a:p>
+            <a:pPr algn="ctr"/>
+            <a:r>
+              <a:rPr sz="2000" b="0" i="0">
+                <a:solidFill>
+                  <a:srgbClr val="828282"/>
+                </a:solidFill>
+                <a:latin typeface="Arial"/>
+              </a:rPr>
+              <a:t>あなたの力強い手で</a:t>
+            </a:r>
+          </a:p>
+        </p:txBody>
+      </p:sp>
+      <p:sp>
+        <p:nvSpPr>
+          <p:cNvPr id="5" name="TextBox 4"/>
+          <p:cNvSpPr txBox="1"/>
+          <p:nvPr/>
+        </p:nvSpPr>
+        <p:spPr>
+          <a:xfrm>
+            <a:off x="640080" y="4494276"/>
+            <a:ext cx="10911535" cy="310896"/>
+          </a:xfrm>
+          <a:prstGeom prst="rect">
+            <a:avLst/>
+          </a:prstGeom>
+          <a:noFill/>
+        </p:spPr>
+        <p:txBody>
+          <a:bodyPr wrap="square">
+            <a:spAutoFit/>
+          </a:bodyPr>
+          <a:lstStyle/>
+          <a:p>
+            <a:pPr algn="ctr"/>
+            <a:r>
+              <a:rPr sz="2000" b="0" i="0">
+                <a:solidFill>
+                  <a:srgbClr val="828282"/>
+                </a:solidFill>
+                <a:latin typeface="Arial"/>
+              </a:rPr>
+              <a:t>大洋が立ち上がり、嵐が轟く時</a:t>
             </a:r>
           </a:p>
         </p:txBody>
